--- a/public/videos/repositories/bus-arrival-guide/bus-arrival-guide-tech-preview.pptx
+++ b/public/videos/repositories/bus-arrival-guide/bus-arrival-guide-tech-preview.pptx
@@ -134,7 +134,7 @@
           <p:cNvPr id="2" name="タイトル 1">
             <a:extLst>
               <a:ext uri="{FF2B5EF4-FFF2-40B4-BE49-F238E27FC236}">
-                <a16:creationId xmlns:a16="http://schemas.microsoft.com/office/drawing/2014/main" id="{7090E9C7-2080-0FE8-32CA-2199B001BA6F}"/>
+                <a16:creationId xmlns:a16="http://schemas.microsoft.com/office/drawing/2014/main" id="{BCB932EB-75A1-D29A-C09B-754EE71A09E5}"/>
               </a:ext>
             </a:extLst>
           </p:cNvPr>
@@ -171,7 +171,7 @@
           <p:cNvPr id="3" name="字幕 2">
             <a:extLst>
               <a:ext uri="{FF2B5EF4-FFF2-40B4-BE49-F238E27FC236}">
-                <a16:creationId xmlns:a16="http://schemas.microsoft.com/office/drawing/2014/main" id="{FD7467E2-8F56-50C9-A589-9767EA492BC4}"/>
+                <a16:creationId xmlns:a16="http://schemas.microsoft.com/office/drawing/2014/main" id="{F633E50C-3C23-4009-175A-2892A14852E7}"/>
               </a:ext>
             </a:extLst>
           </p:cNvPr>
@@ -241,7 +241,7 @@
           <p:cNvPr id="4" name="日付プレースホルダー 3">
             <a:extLst>
               <a:ext uri="{FF2B5EF4-FFF2-40B4-BE49-F238E27FC236}">
-                <a16:creationId xmlns:a16="http://schemas.microsoft.com/office/drawing/2014/main" id="{191EE3B9-099B-AEFC-08FD-98385AB1D810}"/>
+                <a16:creationId xmlns:a16="http://schemas.microsoft.com/office/drawing/2014/main" id="{CACCBF19-E379-225E-61F0-93B4B7784BF5}"/>
               </a:ext>
             </a:extLst>
           </p:cNvPr>
@@ -257,7 +257,7 @@
           <a:bodyPr/>
           <a:lstStyle/>
           <a:p>
-            <a:fld id="{F982E1CB-2137-4693-BB90-208C476C9F82}" type="datetimeFigureOut">
+            <a:fld id="{6BF4EA9D-ABED-463D-B5F1-D05E93716221}" type="datetimeFigureOut">
               <a:rPr kumimoji="1" lang="ja-JP" altLang="en-US" smtClean="0"/>
               <a:t>2026/7/30</a:t>
             </a:fld>
@@ -270,7 +270,7 @@
           <p:cNvPr id="5" name="フッター プレースホルダー 4">
             <a:extLst>
               <a:ext uri="{FF2B5EF4-FFF2-40B4-BE49-F238E27FC236}">
-                <a16:creationId xmlns:a16="http://schemas.microsoft.com/office/drawing/2014/main" id="{33F85703-4A23-1E90-AE9A-D25DE3B1A099}"/>
+                <a16:creationId xmlns:a16="http://schemas.microsoft.com/office/drawing/2014/main" id="{7CDB0F3E-406C-8856-6517-A103088C644E}"/>
               </a:ext>
             </a:extLst>
           </p:cNvPr>
@@ -295,7 +295,7 @@
           <p:cNvPr id="6" name="スライド番号プレースホルダー 5">
             <a:extLst>
               <a:ext uri="{FF2B5EF4-FFF2-40B4-BE49-F238E27FC236}">
-                <a16:creationId xmlns:a16="http://schemas.microsoft.com/office/drawing/2014/main" id="{2209A62E-42A9-8CCC-2F76-71D71662DD1A}"/>
+                <a16:creationId xmlns:a16="http://schemas.microsoft.com/office/drawing/2014/main" id="{3CA8DED4-4A68-5EA7-7136-BA40D53392D0}"/>
               </a:ext>
             </a:extLst>
           </p:cNvPr>
@@ -311,7 +311,7 @@
           <a:bodyPr/>
           <a:lstStyle/>
           <a:p>
-            <a:fld id="{1023ED98-605D-47F7-B5F5-1F5A9FAD4E33}" type="slidenum">
+            <a:fld id="{0D1D62B8-842F-45FF-B7A8-9D8A8E41432F}" type="slidenum">
               <a:rPr kumimoji="1" lang="ja-JP" altLang="en-US" smtClean="0"/>
               <a:t>‹#›</a:t>
             </a:fld>
@@ -322,7 +322,7 @@
     </p:spTree>
     <p:extLst>
       <p:ext uri="{BB962C8B-B14F-4D97-AF65-F5344CB8AC3E}">
-        <p14:creationId xmlns:p14="http://schemas.microsoft.com/office/powerpoint/2010/main" val="807020046"/>
+        <p14:creationId xmlns:p14="http://schemas.microsoft.com/office/powerpoint/2010/main" val="4190202072"/>
       </p:ext>
     </p:extLst>
   </p:cSld>
@@ -354,7 +354,7 @@
           <p:cNvPr id="2" name="タイトル 1">
             <a:extLst>
               <a:ext uri="{FF2B5EF4-FFF2-40B4-BE49-F238E27FC236}">
-                <a16:creationId xmlns:a16="http://schemas.microsoft.com/office/drawing/2014/main" id="{FC7669AC-9D58-E443-56DE-4ACBAA0E3CAB}"/>
+                <a16:creationId xmlns:a16="http://schemas.microsoft.com/office/drawing/2014/main" id="{DCC1AA0A-53EA-03F9-18AF-9E68517F4F91}"/>
               </a:ext>
             </a:extLst>
           </p:cNvPr>
@@ -382,7 +382,7 @@
           <p:cNvPr id="3" name="縦書きテキスト プレースホルダー 2">
             <a:extLst>
               <a:ext uri="{FF2B5EF4-FFF2-40B4-BE49-F238E27FC236}">
-                <a16:creationId xmlns:a16="http://schemas.microsoft.com/office/drawing/2014/main" id="{8EBC63A1-D500-19C3-D74F-059FE7382FFE}"/>
+                <a16:creationId xmlns:a16="http://schemas.microsoft.com/office/drawing/2014/main" id="{9CBC1C1C-F3A5-FD51-5868-A535E2B2E038}"/>
               </a:ext>
             </a:extLst>
           </p:cNvPr>
@@ -471,7 +471,7 @@
           <p:cNvPr id="4" name="日付プレースホルダー 3">
             <a:extLst>
               <a:ext uri="{FF2B5EF4-FFF2-40B4-BE49-F238E27FC236}">
-                <a16:creationId xmlns:a16="http://schemas.microsoft.com/office/drawing/2014/main" id="{DE9ACB82-1703-5C19-8B6D-1CE41E8317F9}"/>
+                <a16:creationId xmlns:a16="http://schemas.microsoft.com/office/drawing/2014/main" id="{8792EFC6-E275-5A1B-F854-677C0D399A32}"/>
               </a:ext>
             </a:extLst>
           </p:cNvPr>
@@ -487,7 +487,7 @@
           <a:bodyPr/>
           <a:lstStyle/>
           <a:p>
-            <a:fld id="{F982E1CB-2137-4693-BB90-208C476C9F82}" type="datetimeFigureOut">
+            <a:fld id="{6BF4EA9D-ABED-463D-B5F1-D05E93716221}" type="datetimeFigureOut">
               <a:rPr kumimoji="1" lang="ja-JP" altLang="en-US" smtClean="0"/>
               <a:t>2026/7/30</a:t>
             </a:fld>
@@ -500,7 +500,7 @@
           <p:cNvPr id="5" name="フッター プレースホルダー 4">
             <a:extLst>
               <a:ext uri="{FF2B5EF4-FFF2-40B4-BE49-F238E27FC236}">
-                <a16:creationId xmlns:a16="http://schemas.microsoft.com/office/drawing/2014/main" id="{963BE82D-BA52-5DBE-D3A3-8C31E66546DA}"/>
+                <a16:creationId xmlns:a16="http://schemas.microsoft.com/office/drawing/2014/main" id="{04222A7D-0A7F-5FE9-2266-9D1A4D2B11D8}"/>
               </a:ext>
             </a:extLst>
           </p:cNvPr>
@@ -525,7 +525,7 @@
           <p:cNvPr id="6" name="スライド番号プレースホルダー 5">
             <a:extLst>
               <a:ext uri="{FF2B5EF4-FFF2-40B4-BE49-F238E27FC236}">
-                <a16:creationId xmlns:a16="http://schemas.microsoft.com/office/drawing/2014/main" id="{BCC0D1AC-5622-00C3-F268-22146BC3E5A3}"/>
+                <a16:creationId xmlns:a16="http://schemas.microsoft.com/office/drawing/2014/main" id="{4083582F-2C7D-2308-B67B-AF578B5E8BA2}"/>
               </a:ext>
             </a:extLst>
           </p:cNvPr>
@@ -541,7 +541,7 @@
           <a:bodyPr/>
           <a:lstStyle/>
           <a:p>
-            <a:fld id="{1023ED98-605D-47F7-B5F5-1F5A9FAD4E33}" type="slidenum">
+            <a:fld id="{0D1D62B8-842F-45FF-B7A8-9D8A8E41432F}" type="slidenum">
               <a:rPr kumimoji="1" lang="ja-JP" altLang="en-US" smtClean="0"/>
               <a:t>‹#›</a:t>
             </a:fld>
@@ -552,7 +552,7 @@
     </p:spTree>
     <p:extLst>
       <p:ext uri="{BB962C8B-B14F-4D97-AF65-F5344CB8AC3E}">
-        <p14:creationId xmlns:p14="http://schemas.microsoft.com/office/powerpoint/2010/main" val="2846844135"/>
+        <p14:creationId xmlns:p14="http://schemas.microsoft.com/office/powerpoint/2010/main" val="1589823845"/>
       </p:ext>
     </p:extLst>
   </p:cSld>
@@ -584,7 +584,7 @@
           <p:cNvPr id="2" name="縦書きタイトル 1">
             <a:extLst>
               <a:ext uri="{FF2B5EF4-FFF2-40B4-BE49-F238E27FC236}">
-                <a16:creationId xmlns:a16="http://schemas.microsoft.com/office/drawing/2014/main" id="{70BE51B9-EE0C-16AE-B495-9E7B8E27F5F3}"/>
+                <a16:creationId xmlns:a16="http://schemas.microsoft.com/office/drawing/2014/main" id="{618331F1-EDF4-9706-2EF0-7A56A16A0F64}"/>
               </a:ext>
             </a:extLst>
           </p:cNvPr>
@@ -617,7 +617,7 @@
           <p:cNvPr id="3" name="縦書きテキスト プレースホルダー 2">
             <a:extLst>
               <a:ext uri="{FF2B5EF4-FFF2-40B4-BE49-F238E27FC236}">
-                <a16:creationId xmlns:a16="http://schemas.microsoft.com/office/drawing/2014/main" id="{9034D81D-81D6-1281-A6F0-5B85F3DA9309}"/>
+                <a16:creationId xmlns:a16="http://schemas.microsoft.com/office/drawing/2014/main" id="{A354AFE4-D4C8-484A-D73C-DAAEE423BDC9}"/>
               </a:ext>
             </a:extLst>
           </p:cNvPr>
@@ -711,7 +711,7 @@
           <p:cNvPr id="4" name="日付プレースホルダー 3">
             <a:extLst>
               <a:ext uri="{FF2B5EF4-FFF2-40B4-BE49-F238E27FC236}">
-                <a16:creationId xmlns:a16="http://schemas.microsoft.com/office/drawing/2014/main" id="{809539AE-15FD-70C0-1E50-AC48383FE397}"/>
+                <a16:creationId xmlns:a16="http://schemas.microsoft.com/office/drawing/2014/main" id="{189008F8-6B9F-5FDF-D7D5-CB2D8D16B8EF}"/>
               </a:ext>
             </a:extLst>
           </p:cNvPr>
@@ -727,7 +727,7 @@
           <a:bodyPr/>
           <a:lstStyle/>
           <a:p>
-            <a:fld id="{F982E1CB-2137-4693-BB90-208C476C9F82}" type="datetimeFigureOut">
+            <a:fld id="{6BF4EA9D-ABED-463D-B5F1-D05E93716221}" type="datetimeFigureOut">
               <a:rPr kumimoji="1" lang="ja-JP" altLang="en-US" smtClean="0"/>
               <a:t>2026/7/30</a:t>
             </a:fld>
@@ -740,7 +740,7 @@
           <p:cNvPr id="5" name="フッター プレースホルダー 4">
             <a:extLst>
               <a:ext uri="{FF2B5EF4-FFF2-40B4-BE49-F238E27FC236}">
-                <a16:creationId xmlns:a16="http://schemas.microsoft.com/office/drawing/2014/main" id="{C5F1B168-FF94-F300-E594-4A07006EFF73}"/>
+                <a16:creationId xmlns:a16="http://schemas.microsoft.com/office/drawing/2014/main" id="{8642B4B4-E3C5-D0FC-5520-A5D8DEE5782A}"/>
               </a:ext>
             </a:extLst>
           </p:cNvPr>
@@ -765,7 +765,7 @@
           <p:cNvPr id="6" name="スライド番号プレースホルダー 5">
             <a:extLst>
               <a:ext uri="{FF2B5EF4-FFF2-40B4-BE49-F238E27FC236}">
-                <a16:creationId xmlns:a16="http://schemas.microsoft.com/office/drawing/2014/main" id="{821F925C-D5BF-0D92-756B-E93B27128E5A}"/>
+                <a16:creationId xmlns:a16="http://schemas.microsoft.com/office/drawing/2014/main" id="{E522F1C4-73C2-B83B-878E-5450E70FE124}"/>
               </a:ext>
             </a:extLst>
           </p:cNvPr>
@@ -781,7 +781,7 @@
           <a:bodyPr/>
           <a:lstStyle/>
           <a:p>
-            <a:fld id="{1023ED98-605D-47F7-B5F5-1F5A9FAD4E33}" type="slidenum">
+            <a:fld id="{0D1D62B8-842F-45FF-B7A8-9D8A8E41432F}" type="slidenum">
               <a:rPr kumimoji="1" lang="ja-JP" altLang="en-US" smtClean="0"/>
               <a:t>‹#›</a:t>
             </a:fld>
@@ -792,7 +792,7 @@
     </p:spTree>
     <p:extLst>
       <p:ext uri="{BB962C8B-B14F-4D97-AF65-F5344CB8AC3E}">
-        <p14:creationId xmlns:p14="http://schemas.microsoft.com/office/powerpoint/2010/main" val="1530883606"/>
+        <p14:creationId xmlns:p14="http://schemas.microsoft.com/office/powerpoint/2010/main" val="888874359"/>
       </p:ext>
     </p:extLst>
   </p:cSld>
@@ -824,7 +824,7 @@
           <p:cNvPr id="2" name="タイトル 1">
             <a:extLst>
               <a:ext uri="{FF2B5EF4-FFF2-40B4-BE49-F238E27FC236}">
-                <a16:creationId xmlns:a16="http://schemas.microsoft.com/office/drawing/2014/main" id="{1E8C3D52-964C-F4D7-B004-137520BAC460}"/>
+                <a16:creationId xmlns:a16="http://schemas.microsoft.com/office/drawing/2014/main" id="{B5F89AD9-4406-2A89-DF3B-755F3DAEDC45}"/>
               </a:ext>
             </a:extLst>
           </p:cNvPr>
@@ -852,7 +852,7 @@
           <p:cNvPr id="3" name="コンテンツ プレースホルダー 2">
             <a:extLst>
               <a:ext uri="{FF2B5EF4-FFF2-40B4-BE49-F238E27FC236}">
-                <a16:creationId xmlns:a16="http://schemas.microsoft.com/office/drawing/2014/main" id="{EA84E1DE-6C9D-A0ED-0F6A-DB2071DCF7CC}"/>
+                <a16:creationId xmlns:a16="http://schemas.microsoft.com/office/drawing/2014/main" id="{DBCFDE65-0D84-0D86-22E0-5568E2E569BB}"/>
               </a:ext>
             </a:extLst>
           </p:cNvPr>
@@ -941,7 +941,7 @@
           <p:cNvPr id="4" name="日付プレースホルダー 3">
             <a:extLst>
               <a:ext uri="{FF2B5EF4-FFF2-40B4-BE49-F238E27FC236}">
-                <a16:creationId xmlns:a16="http://schemas.microsoft.com/office/drawing/2014/main" id="{F1F05E00-89B5-9BC6-C3F9-6316D11E149E}"/>
+                <a16:creationId xmlns:a16="http://schemas.microsoft.com/office/drawing/2014/main" id="{192791D9-93EE-593B-6005-596B082E9EED}"/>
               </a:ext>
             </a:extLst>
           </p:cNvPr>
@@ -957,7 +957,7 @@
           <a:bodyPr/>
           <a:lstStyle/>
           <a:p>
-            <a:fld id="{F982E1CB-2137-4693-BB90-208C476C9F82}" type="datetimeFigureOut">
+            <a:fld id="{6BF4EA9D-ABED-463D-B5F1-D05E93716221}" type="datetimeFigureOut">
               <a:rPr kumimoji="1" lang="ja-JP" altLang="en-US" smtClean="0"/>
               <a:t>2026/7/30</a:t>
             </a:fld>
@@ -970,7 +970,7 @@
           <p:cNvPr id="5" name="フッター プレースホルダー 4">
             <a:extLst>
               <a:ext uri="{FF2B5EF4-FFF2-40B4-BE49-F238E27FC236}">
-                <a16:creationId xmlns:a16="http://schemas.microsoft.com/office/drawing/2014/main" id="{FC3AF9ED-9522-A6CB-DD9D-B66EBED99281}"/>
+                <a16:creationId xmlns:a16="http://schemas.microsoft.com/office/drawing/2014/main" id="{51A301AA-A827-C975-08C5-E40252214538}"/>
               </a:ext>
             </a:extLst>
           </p:cNvPr>
@@ -995,7 +995,7 @@
           <p:cNvPr id="6" name="スライド番号プレースホルダー 5">
             <a:extLst>
               <a:ext uri="{FF2B5EF4-FFF2-40B4-BE49-F238E27FC236}">
-                <a16:creationId xmlns:a16="http://schemas.microsoft.com/office/drawing/2014/main" id="{27F62E0C-7E65-6DB3-8550-5A407806C013}"/>
+                <a16:creationId xmlns:a16="http://schemas.microsoft.com/office/drawing/2014/main" id="{03CE91CC-6628-FA11-7AC3-4B8E04F5083B}"/>
               </a:ext>
             </a:extLst>
           </p:cNvPr>
@@ -1011,7 +1011,7 @@
           <a:bodyPr/>
           <a:lstStyle/>
           <a:p>
-            <a:fld id="{1023ED98-605D-47F7-B5F5-1F5A9FAD4E33}" type="slidenum">
+            <a:fld id="{0D1D62B8-842F-45FF-B7A8-9D8A8E41432F}" type="slidenum">
               <a:rPr kumimoji="1" lang="ja-JP" altLang="en-US" smtClean="0"/>
               <a:t>‹#›</a:t>
             </a:fld>
@@ -1022,7 +1022,7 @@
     </p:spTree>
     <p:extLst>
       <p:ext uri="{BB962C8B-B14F-4D97-AF65-F5344CB8AC3E}">
-        <p14:creationId xmlns:p14="http://schemas.microsoft.com/office/powerpoint/2010/main" val="4045720769"/>
+        <p14:creationId xmlns:p14="http://schemas.microsoft.com/office/powerpoint/2010/main" val="49734199"/>
       </p:ext>
     </p:extLst>
   </p:cSld>
@@ -1054,7 +1054,7 @@
           <p:cNvPr id="2" name="タイトル 1">
             <a:extLst>
               <a:ext uri="{FF2B5EF4-FFF2-40B4-BE49-F238E27FC236}">
-                <a16:creationId xmlns:a16="http://schemas.microsoft.com/office/drawing/2014/main" id="{0A152177-E9C1-EAD1-4B95-216BF4C1780E}"/>
+                <a16:creationId xmlns:a16="http://schemas.microsoft.com/office/drawing/2014/main" id="{D672141F-05CF-A394-1EBF-4EA8121BAA48}"/>
               </a:ext>
             </a:extLst>
           </p:cNvPr>
@@ -1091,7 +1091,7 @@
           <p:cNvPr id="3" name="テキスト プレースホルダー 2">
             <a:extLst>
               <a:ext uri="{FF2B5EF4-FFF2-40B4-BE49-F238E27FC236}">
-                <a16:creationId xmlns:a16="http://schemas.microsoft.com/office/drawing/2014/main" id="{D778129E-3F96-7C5B-6775-78367BF02D06}"/>
+                <a16:creationId xmlns:a16="http://schemas.microsoft.com/office/drawing/2014/main" id="{D4FAC9CB-65DB-F3CB-A938-0C8B5B1D86C3}"/>
               </a:ext>
             </a:extLst>
           </p:cNvPr>
@@ -1216,7 +1216,7 @@
           <p:cNvPr id="4" name="日付プレースホルダー 3">
             <a:extLst>
               <a:ext uri="{FF2B5EF4-FFF2-40B4-BE49-F238E27FC236}">
-                <a16:creationId xmlns:a16="http://schemas.microsoft.com/office/drawing/2014/main" id="{570CDC53-3AC6-56DE-4B8A-085D26BC2622}"/>
+                <a16:creationId xmlns:a16="http://schemas.microsoft.com/office/drawing/2014/main" id="{19736C37-B3F5-55BC-3A70-8BC8A678879F}"/>
               </a:ext>
             </a:extLst>
           </p:cNvPr>
@@ -1232,7 +1232,7 @@
           <a:bodyPr/>
           <a:lstStyle/>
           <a:p>
-            <a:fld id="{F982E1CB-2137-4693-BB90-208C476C9F82}" type="datetimeFigureOut">
+            <a:fld id="{6BF4EA9D-ABED-463D-B5F1-D05E93716221}" type="datetimeFigureOut">
               <a:rPr kumimoji="1" lang="ja-JP" altLang="en-US" smtClean="0"/>
               <a:t>2026/7/30</a:t>
             </a:fld>
@@ -1245,7 +1245,7 @@
           <p:cNvPr id="5" name="フッター プレースホルダー 4">
             <a:extLst>
               <a:ext uri="{FF2B5EF4-FFF2-40B4-BE49-F238E27FC236}">
-                <a16:creationId xmlns:a16="http://schemas.microsoft.com/office/drawing/2014/main" id="{F7E035BA-4A55-5991-72B1-AE9BD343AC1D}"/>
+                <a16:creationId xmlns:a16="http://schemas.microsoft.com/office/drawing/2014/main" id="{300E18E5-29C6-982B-FB0D-31E5350F24E4}"/>
               </a:ext>
             </a:extLst>
           </p:cNvPr>
@@ -1270,7 +1270,7 @@
           <p:cNvPr id="6" name="スライド番号プレースホルダー 5">
             <a:extLst>
               <a:ext uri="{FF2B5EF4-FFF2-40B4-BE49-F238E27FC236}">
-                <a16:creationId xmlns:a16="http://schemas.microsoft.com/office/drawing/2014/main" id="{2522DE7F-CB39-6D8F-A8F6-7945787DD206}"/>
+                <a16:creationId xmlns:a16="http://schemas.microsoft.com/office/drawing/2014/main" id="{13D1A15D-3578-490B-70C9-4DCEDEE3D42B}"/>
               </a:ext>
             </a:extLst>
           </p:cNvPr>
@@ -1286,7 +1286,7 @@
           <a:bodyPr/>
           <a:lstStyle/>
           <a:p>
-            <a:fld id="{1023ED98-605D-47F7-B5F5-1F5A9FAD4E33}" type="slidenum">
+            <a:fld id="{0D1D62B8-842F-45FF-B7A8-9D8A8E41432F}" type="slidenum">
               <a:rPr kumimoji="1" lang="ja-JP" altLang="en-US" smtClean="0"/>
               <a:t>‹#›</a:t>
             </a:fld>
@@ -1297,7 +1297,7 @@
     </p:spTree>
     <p:extLst>
       <p:ext uri="{BB962C8B-B14F-4D97-AF65-F5344CB8AC3E}">
-        <p14:creationId xmlns:p14="http://schemas.microsoft.com/office/powerpoint/2010/main" val="1956363712"/>
+        <p14:creationId xmlns:p14="http://schemas.microsoft.com/office/powerpoint/2010/main" val="2115927984"/>
       </p:ext>
     </p:extLst>
   </p:cSld>
@@ -1329,7 +1329,7 @@
           <p:cNvPr id="2" name="タイトル 1">
             <a:extLst>
               <a:ext uri="{FF2B5EF4-FFF2-40B4-BE49-F238E27FC236}">
-                <a16:creationId xmlns:a16="http://schemas.microsoft.com/office/drawing/2014/main" id="{3B56C8EF-1941-99B8-796B-2DC254D6C773}"/>
+                <a16:creationId xmlns:a16="http://schemas.microsoft.com/office/drawing/2014/main" id="{FD210174-318D-C956-1D95-1C11CB38B765}"/>
               </a:ext>
             </a:extLst>
           </p:cNvPr>
@@ -1357,7 +1357,7 @@
           <p:cNvPr id="3" name="コンテンツ プレースホルダー 2">
             <a:extLst>
               <a:ext uri="{FF2B5EF4-FFF2-40B4-BE49-F238E27FC236}">
-                <a16:creationId xmlns:a16="http://schemas.microsoft.com/office/drawing/2014/main" id="{F1C4B1AD-DE86-D327-721B-E4B0AE367338}"/>
+                <a16:creationId xmlns:a16="http://schemas.microsoft.com/office/drawing/2014/main" id="{145F8C22-F273-BDAF-1419-495B5D57D240}"/>
               </a:ext>
             </a:extLst>
           </p:cNvPr>
@@ -1451,7 +1451,7 @@
           <p:cNvPr id="4" name="コンテンツ プレースホルダー 3">
             <a:extLst>
               <a:ext uri="{FF2B5EF4-FFF2-40B4-BE49-F238E27FC236}">
-                <a16:creationId xmlns:a16="http://schemas.microsoft.com/office/drawing/2014/main" id="{E49B3364-2D16-F2AC-EB43-0570C561C6F5}"/>
+                <a16:creationId xmlns:a16="http://schemas.microsoft.com/office/drawing/2014/main" id="{F41EBC46-0797-996A-7687-6E27A41F80A0}"/>
               </a:ext>
             </a:extLst>
           </p:cNvPr>
@@ -1545,7 +1545,7 @@
           <p:cNvPr id="5" name="日付プレースホルダー 4">
             <a:extLst>
               <a:ext uri="{FF2B5EF4-FFF2-40B4-BE49-F238E27FC236}">
-                <a16:creationId xmlns:a16="http://schemas.microsoft.com/office/drawing/2014/main" id="{94E862B6-B0EF-B71C-BF4D-DAB9B65DF8D5}"/>
+                <a16:creationId xmlns:a16="http://schemas.microsoft.com/office/drawing/2014/main" id="{A0912254-F910-E1A4-62BD-3CE55932FDF6}"/>
               </a:ext>
             </a:extLst>
           </p:cNvPr>
@@ -1561,7 +1561,7 @@
           <a:bodyPr/>
           <a:lstStyle/>
           <a:p>
-            <a:fld id="{F982E1CB-2137-4693-BB90-208C476C9F82}" type="datetimeFigureOut">
+            <a:fld id="{6BF4EA9D-ABED-463D-B5F1-D05E93716221}" type="datetimeFigureOut">
               <a:rPr kumimoji="1" lang="ja-JP" altLang="en-US" smtClean="0"/>
               <a:t>2026/7/30</a:t>
             </a:fld>
@@ -1574,7 +1574,7 @@
           <p:cNvPr id="6" name="フッター プレースホルダー 5">
             <a:extLst>
               <a:ext uri="{FF2B5EF4-FFF2-40B4-BE49-F238E27FC236}">
-                <a16:creationId xmlns:a16="http://schemas.microsoft.com/office/drawing/2014/main" id="{890A43FE-8BD0-4265-2E03-B5CAEB3D0BAC}"/>
+                <a16:creationId xmlns:a16="http://schemas.microsoft.com/office/drawing/2014/main" id="{BE46003E-3F06-B024-7C69-1C5E63C74096}"/>
               </a:ext>
             </a:extLst>
           </p:cNvPr>
@@ -1599,7 +1599,7 @@
           <p:cNvPr id="7" name="スライド番号プレースホルダー 6">
             <a:extLst>
               <a:ext uri="{FF2B5EF4-FFF2-40B4-BE49-F238E27FC236}">
-                <a16:creationId xmlns:a16="http://schemas.microsoft.com/office/drawing/2014/main" id="{64E4900F-D7A2-5220-B963-E561AA2227C5}"/>
+                <a16:creationId xmlns:a16="http://schemas.microsoft.com/office/drawing/2014/main" id="{DC900C5F-FB56-FA82-1A54-F110C39A3130}"/>
               </a:ext>
             </a:extLst>
           </p:cNvPr>
@@ -1615,7 +1615,7 @@
           <a:bodyPr/>
           <a:lstStyle/>
           <a:p>
-            <a:fld id="{1023ED98-605D-47F7-B5F5-1F5A9FAD4E33}" type="slidenum">
+            <a:fld id="{0D1D62B8-842F-45FF-B7A8-9D8A8E41432F}" type="slidenum">
               <a:rPr kumimoji="1" lang="ja-JP" altLang="en-US" smtClean="0"/>
               <a:t>‹#›</a:t>
             </a:fld>
@@ -1626,7 +1626,7 @@
     </p:spTree>
     <p:extLst>
       <p:ext uri="{BB962C8B-B14F-4D97-AF65-F5344CB8AC3E}">
-        <p14:creationId xmlns:p14="http://schemas.microsoft.com/office/powerpoint/2010/main" val="3264433736"/>
+        <p14:creationId xmlns:p14="http://schemas.microsoft.com/office/powerpoint/2010/main" val="2411485309"/>
       </p:ext>
     </p:extLst>
   </p:cSld>
@@ -1658,7 +1658,7 @@
           <p:cNvPr id="2" name="タイトル 1">
             <a:extLst>
               <a:ext uri="{FF2B5EF4-FFF2-40B4-BE49-F238E27FC236}">
-                <a16:creationId xmlns:a16="http://schemas.microsoft.com/office/drawing/2014/main" id="{FDEC60DD-DCEB-C096-828D-D7095446D207}"/>
+                <a16:creationId xmlns:a16="http://schemas.microsoft.com/office/drawing/2014/main" id="{596CE4F0-55D2-82B7-6869-00C2FCE3980D}"/>
               </a:ext>
             </a:extLst>
           </p:cNvPr>
@@ -1691,7 +1691,7 @@
           <p:cNvPr id="3" name="テキスト プレースホルダー 2">
             <a:extLst>
               <a:ext uri="{FF2B5EF4-FFF2-40B4-BE49-F238E27FC236}">
-                <a16:creationId xmlns:a16="http://schemas.microsoft.com/office/drawing/2014/main" id="{143EDA44-D814-C16C-5B5C-25A05A8FEDE1}"/>
+                <a16:creationId xmlns:a16="http://schemas.microsoft.com/office/drawing/2014/main" id="{60677348-1559-BB7E-6F9C-2520A4DD8F9F}"/>
               </a:ext>
             </a:extLst>
           </p:cNvPr>
@@ -1762,7 +1762,7 @@
           <p:cNvPr id="4" name="コンテンツ プレースホルダー 3">
             <a:extLst>
               <a:ext uri="{FF2B5EF4-FFF2-40B4-BE49-F238E27FC236}">
-                <a16:creationId xmlns:a16="http://schemas.microsoft.com/office/drawing/2014/main" id="{24F648D9-7931-6EB1-1585-80063384BF63}"/>
+                <a16:creationId xmlns:a16="http://schemas.microsoft.com/office/drawing/2014/main" id="{725AB302-A205-A5E1-97B5-B6DA67012077}"/>
               </a:ext>
             </a:extLst>
           </p:cNvPr>
@@ -1856,7 +1856,7 @@
           <p:cNvPr id="5" name="テキスト プレースホルダー 4">
             <a:extLst>
               <a:ext uri="{FF2B5EF4-FFF2-40B4-BE49-F238E27FC236}">
-                <a16:creationId xmlns:a16="http://schemas.microsoft.com/office/drawing/2014/main" id="{5258938F-BB50-9AA9-A16C-144E0D47DA56}"/>
+                <a16:creationId xmlns:a16="http://schemas.microsoft.com/office/drawing/2014/main" id="{BF383F2C-698D-9B94-15C1-D323111C911E}"/>
               </a:ext>
             </a:extLst>
           </p:cNvPr>
@@ -1927,7 +1927,7 @@
           <p:cNvPr id="6" name="コンテンツ プレースホルダー 5">
             <a:extLst>
               <a:ext uri="{FF2B5EF4-FFF2-40B4-BE49-F238E27FC236}">
-                <a16:creationId xmlns:a16="http://schemas.microsoft.com/office/drawing/2014/main" id="{4A583847-74AA-AFD6-9BF3-871FA92D94D4}"/>
+                <a16:creationId xmlns:a16="http://schemas.microsoft.com/office/drawing/2014/main" id="{627AA671-FBB0-BF93-21B2-8F18AC268685}"/>
               </a:ext>
             </a:extLst>
           </p:cNvPr>
@@ -2021,7 +2021,7 @@
           <p:cNvPr id="7" name="日付プレースホルダー 6">
             <a:extLst>
               <a:ext uri="{FF2B5EF4-FFF2-40B4-BE49-F238E27FC236}">
-                <a16:creationId xmlns:a16="http://schemas.microsoft.com/office/drawing/2014/main" id="{81271D2A-00BF-68E2-21CF-37B6DC7F4DEB}"/>
+                <a16:creationId xmlns:a16="http://schemas.microsoft.com/office/drawing/2014/main" id="{95E61F33-3925-BBC9-9BE9-4830376E65CD}"/>
               </a:ext>
             </a:extLst>
           </p:cNvPr>
@@ -2037,7 +2037,7 @@
           <a:bodyPr/>
           <a:lstStyle/>
           <a:p>
-            <a:fld id="{F982E1CB-2137-4693-BB90-208C476C9F82}" type="datetimeFigureOut">
+            <a:fld id="{6BF4EA9D-ABED-463D-B5F1-D05E93716221}" type="datetimeFigureOut">
               <a:rPr kumimoji="1" lang="ja-JP" altLang="en-US" smtClean="0"/>
               <a:t>2026/7/30</a:t>
             </a:fld>
@@ -2050,7 +2050,7 @@
           <p:cNvPr id="8" name="フッター プレースホルダー 7">
             <a:extLst>
               <a:ext uri="{FF2B5EF4-FFF2-40B4-BE49-F238E27FC236}">
-                <a16:creationId xmlns:a16="http://schemas.microsoft.com/office/drawing/2014/main" id="{E57B95DB-7A07-BD69-6434-6134D0257CE7}"/>
+                <a16:creationId xmlns:a16="http://schemas.microsoft.com/office/drawing/2014/main" id="{357D338E-21D0-1BED-0CB0-4754E1200549}"/>
               </a:ext>
             </a:extLst>
           </p:cNvPr>
@@ -2075,7 +2075,7 @@
           <p:cNvPr id="9" name="スライド番号プレースホルダー 8">
             <a:extLst>
               <a:ext uri="{FF2B5EF4-FFF2-40B4-BE49-F238E27FC236}">
-                <a16:creationId xmlns:a16="http://schemas.microsoft.com/office/drawing/2014/main" id="{66F5775E-CB70-861F-FE9D-FBEA02AA4BBB}"/>
+                <a16:creationId xmlns:a16="http://schemas.microsoft.com/office/drawing/2014/main" id="{213EA1F1-2EA5-FD38-70A0-10FAC7FB3D72}"/>
               </a:ext>
             </a:extLst>
           </p:cNvPr>
@@ -2091,7 +2091,7 @@
           <a:bodyPr/>
           <a:lstStyle/>
           <a:p>
-            <a:fld id="{1023ED98-605D-47F7-B5F5-1F5A9FAD4E33}" type="slidenum">
+            <a:fld id="{0D1D62B8-842F-45FF-B7A8-9D8A8E41432F}" type="slidenum">
               <a:rPr kumimoji="1" lang="ja-JP" altLang="en-US" smtClean="0"/>
               <a:t>‹#›</a:t>
             </a:fld>
@@ -2102,7 +2102,7 @@
     </p:spTree>
     <p:extLst>
       <p:ext uri="{BB962C8B-B14F-4D97-AF65-F5344CB8AC3E}">
-        <p14:creationId xmlns:p14="http://schemas.microsoft.com/office/powerpoint/2010/main" val="77063738"/>
+        <p14:creationId xmlns:p14="http://schemas.microsoft.com/office/powerpoint/2010/main" val="546990803"/>
       </p:ext>
     </p:extLst>
   </p:cSld>
@@ -2134,7 +2134,7 @@
           <p:cNvPr id="2" name="タイトル 1">
             <a:extLst>
               <a:ext uri="{FF2B5EF4-FFF2-40B4-BE49-F238E27FC236}">
-                <a16:creationId xmlns:a16="http://schemas.microsoft.com/office/drawing/2014/main" id="{A5245235-9A2D-E01E-CA10-6938A5CCE5E0}"/>
+                <a16:creationId xmlns:a16="http://schemas.microsoft.com/office/drawing/2014/main" id="{145D23F9-44C6-F87B-C1B5-2BA30310CE32}"/>
               </a:ext>
             </a:extLst>
           </p:cNvPr>
@@ -2162,7 +2162,7 @@
           <p:cNvPr id="3" name="日付プレースホルダー 2">
             <a:extLst>
               <a:ext uri="{FF2B5EF4-FFF2-40B4-BE49-F238E27FC236}">
-                <a16:creationId xmlns:a16="http://schemas.microsoft.com/office/drawing/2014/main" id="{4EEFFF08-8E73-8C82-4375-CAFB019A93D2}"/>
+                <a16:creationId xmlns:a16="http://schemas.microsoft.com/office/drawing/2014/main" id="{BABE562D-19C2-FC72-51C0-9C447C7E87CD}"/>
               </a:ext>
             </a:extLst>
           </p:cNvPr>
@@ -2178,7 +2178,7 @@
           <a:bodyPr/>
           <a:lstStyle/>
           <a:p>
-            <a:fld id="{F982E1CB-2137-4693-BB90-208C476C9F82}" type="datetimeFigureOut">
+            <a:fld id="{6BF4EA9D-ABED-463D-B5F1-D05E93716221}" type="datetimeFigureOut">
               <a:rPr kumimoji="1" lang="ja-JP" altLang="en-US" smtClean="0"/>
               <a:t>2026/7/30</a:t>
             </a:fld>
@@ -2191,7 +2191,7 @@
           <p:cNvPr id="4" name="フッター プレースホルダー 3">
             <a:extLst>
               <a:ext uri="{FF2B5EF4-FFF2-40B4-BE49-F238E27FC236}">
-                <a16:creationId xmlns:a16="http://schemas.microsoft.com/office/drawing/2014/main" id="{0F0CBFC6-DDF5-3C6D-91FF-BCBF15FDBC3F}"/>
+                <a16:creationId xmlns:a16="http://schemas.microsoft.com/office/drawing/2014/main" id="{DA027568-65F0-102A-F854-E17113D7B6F9}"/>
               </a:ext>
             </a:extLst>
           </p:cNvPr>
@@ -2216,7 +2216,7 @@
           <p:cNvPr id="5" name="スライド番号プレースホルダー 4">
             <a:extLst>
               <a:ext uri="{FF2B5EF4-FFF2-40B4-BE49-F238E27FC236}">
-                <a16:creationId xmlns:a16="http://schemas.microsoft.com/office/drawing/2014/main" id="{A1729BB3-2108-BF28-516F-87D739056539}"/>
+                <a16:creationId xmlns:a16="http://schemas.microsoft.com/office/drawing/2014/main" id="{7229E253-25B5-3389-57F3-CC886066F7BD}"/>
               </a:ext>
             </a:extLst>
           </p:cNvPr>
@@ -2232,7 +2232,7 @@
           <a:bodyPr/>
           <a:lstStyle/>
           <a:p>
-            <a:fld id="{1023ED98-605D-47F7-B5F5-1F5A9FAD4E33}" type="slidenum">
+            <a:fld id="{0D1D62B8-842F-45FF-B7A8-9D8A8E41432F}" type="slidenum">
               <a:rPr kumimoji="1" lang="ja-JP" altLang="en-US" smtClean="0"/>
               <a:t>‹#›</a:t>
             </a:fld>
@@ -2243,7 +2243,7 @@
     </p:spTree>
     <p:extLst>
       <p:ext uri="{BB962C8B-B14F-4D97-AF65-F5344CB8AC3E}">
-        <p14:creationId xmlns:p14="http://schemas.microsoft.com/office/powerpoint/2010/main" val="4215062565"/>
+        <p14:creationId xmlns:p14="http://schemas.microsoft.com/office/powerpoint/2010/main" val="1489127288"/>
       </p:ext>
     </p:extLst>
   </p:cSld>
@@ -2275,7 +2275,7 @@
           <p:cNvPr id="2" name="日付プレースホルダー 1">
             <a:extLst>
               <a:ext uri="{FF2B5EF4-FFF2-40B4-BE49-F238E27FC236}">
-                <a16:creationId xmlns:a16="http://schemas.microsoft.com/office/drawing/2014/main" id="{350EAECD-512E-7AE9-BFE3-6E1BF1B85520}"/>
+                <a16:creationId xmlns:a16="http://schemas.microsoft.com/office/drawing/2014/main" id="{A8F616F0-BBE7-6723-2DFD-DEBF369571B2}"/>
               </a:ext>
             </a:extLst>
           </p:cNvPr>
@@ -2291,7 +2291,7 @@
           <a:bodyPr/>
           <a:lstStyle/>
           <a:p>
-            <a:fld id="{F982E1CB-2137-4693-BB90-208C476C9F82}" type="datetimeFigureOut">
+            <a:fld id="{6BF4EA9D-ABED-463D-B5F1-D05E93716221}" type="datetimeFigureOut">
               <a:rPr kumimoji="1" lang="ja-JP" altLang="en-US" smtClean="0"/>
               <a:t>2026/7/30</a:t>
             </a:fld>
@@ -2304,7 +2304,7 @@
           <p:cNvPr id="3" name="フッター プレースホルダー 2">
             <a:extLst>
               <a:ext uri="{FF2B5EF4-FFF2-40B4-BE49-F238E27FC236}">
-                <a16:creationId xmlns:a16="http://schemas.microsoft.com/office/drawing/2014/main" id="{03C336DD-8A2D-FFD4-0CFF-91E7CADAD510}"/>
+                <a16:creationId xmlns:a16="http://schemas.microsoft.com/office/drawing/2014/main" id="{229E4C18-86CD-36D4-F855-2F9013ACFD05}"/>
               </a:ext>
             </a:extLst>
           </p:cNvPr>
@@ -2329,7 +2329,7 @@
           <p:cNvPr id="4" name="スライド番号プレースホルダー 3">
             <a:extLst>
               <a:ext uri="{FF2B5EF4-FFF2-40B4-BE49-F238E27FC236}">
-                <a16:creationId xmlns:a16="http://schemas.microsoft.com/office/drawing/2014/main" id="{FD8027EB-5234-CF20-BCE4-A9F13FCF09E5}"/>
+                <a16:creationId xmlns:a16="http://schemas.microsoft.com/office/drawing/2014/main" id="{1C298703-9869-14EA-EB62-EB86AF8785DA}"/>
               </a:ext>
             </a:extLst>
           </p:cNvPr>
@@ -2345,7 +2345,7 @@
           <a:bodyPr/>
           <a:lstStyle/>
           <a:p>
-            <a:fld id="{1023ED98-605D-47F7-B5F5-1F5A9FAD4E33}" type="slidenum">
+            <a:fld id="{0D1D62B8-842F-45FF-B7A8-9D8A8E41432F}" type="slidenum">
               <a:rPr kumimoji="1" lang="ja-JP" altLang="en-US" smtClean="0"/>
               <a:t>‹#›</a:t>
             </a:fld>
@@ -2356,7 +2356,7 @@
     </p:spTree>
     <p:extLst>
       <p:ext uri="{BB962C8B-B14F-4D97-AF65-F5344CB8AC3E}">
-        <p14:creationId xmlns:p14="http://schemas.microsoft.com/office/powerpoint/2010/main" val="3950548435"/>
+        <p14:creationId xmlns:p14="http://schemas.microsoft.com/office/powerpoint/2010/main" val="1884258239"/>
       </p:ext>
     </p:extLst>
   </p:cSld>
@@ -2388,7 +2388,7 @@
           <p:cNvPr id="2" name="タイトル 1">
             <a:extLst>
               <a:ext uri="{FF2B5EF4-FFF2-40B4-BE49-F238E27FC236}">
-                <a16:creationId xmlns:a16="http://schemas.microsoft.com/office/drawing/2014/main" id="{3FAF478E-AEDC-3F3E-67C4-64E970406F05}"/>
+                <a16:creationId xmlns:a16="http://schemas.microsoft.com/office/drawing/2014/main" id="{F0C2C9D1-8118-3E09-D402-D428892A86D3}"/>
               </a:ext>
             </a:extLst>
           </p:cNvPr>
@@ -2425,7 +2425,7 @@
           <p:cNvPr id="3" name="コンテンツ プレースホルダー 2">
             <a:extLst>
               <a:ext uri="{FF2B5EF4-FFF2-40B4-BE49-F238E27FC236}">
-                <a16:creationId xmlns:a16="http://schemas.microsoft.com/office/drawing/2014/main" id="{2989ED71-917D-C202-C3EE-8B42A9A7FCC5}"/>
+                <a16:creationId xmlns:a16="http://schemas.microsoft.com/office/drawing/2014/main" id="{F5402F91-1D8F-5E79-BCF2-25BAE4C4ABEC}"/>
               </a:ext>
             </a:extLst>
           </p:cNvPr>
@@ -2547,7 +2547,7 @@
           <p:cNvPr id="4" name="テキスト プレースホルダー 3">
             <a:extLst>
               <a:ext uri="{FF2B5EF4-FFF2-40B4-BE49-F238E27FC236}">
-                <a16:creationId xmlns:a16="http://schemas.microsoft.com/office/drawing/2014/main" id="{83941366-8C7A-C390-B080-5A0D72A3410D}"/>
+                <a16:creationId xmlns:a16="http://schemas.microsoft.com/office/drawing/2014/main" id="{C2342C0F-5762-D9A2-FB19-2E0ECE74E695}"/>
               </a:ext>
             </a:extLst>
           </p:cNvPr>
@@ -2618,7 +2618,7 @@
           <p:cNvPr id="5" name="日付プレースホルダー 4">
             <a:extLst>
               <a:ext uri="{FF2B5EF4-FFF2-40B4-BE49-F238E27FC236}">
-                <a16:creationId xmlns:a16="http://schemas.microsoft.com/office/drawing/2014/main" id="{8423A7DF-C2B8-F58A-4AD5-16595988FF27}"/>
+                <a16:creationId xmlns:a16="http://schemas.microsoft.com/office/drawing/2014/main" id="{AD53D3D6-5C7A-4D4E-A780-4640569FB32D}"/>
               </a:ext>
             </a:extLst>
           </p:cNvPr>
@@ -2634,7 +2634,7 @@
           <a:bodyPr/>
           <a:lstStyle/>
           <a:p>
-            <a:fld id="{F982E1CB-2137-4693-BB90-208C476C9F82}" type="datetimeFigureOut">
+            <a:fld id="{6BF4EA9D-ABED-463D-B5F1-D05E93716221}" type="datetimeFigureOut">
               <a:rPr kumimoji="1" lang="ja-JP" altLang="en-US" smtClean="0"/>
               <a:t>2026/7/30</a:t>
             </a:fld>
@@ -2647,7 +2647,7 @@
           <p:cNvPr id="6" name="フッター プレースホルダー 5">
             <a:extLst>
               <a:ext uri="{FF2B5EF4-FFF2-40B4-BE49-F238E27FC236}">
-                <a16:creationId xmlns:a16="http://schemas.microsoft.com/office/drawing/2014/main" id="{EDE99201-F6B1-D21F-10FE-D9810426AD65}"/>
+                <a16:creationId xmlns:a16="http://schemas.microsoft.com/office/drawing/2014/main" id="{F98A8F72-FEE4-050A-4629-A97BDB960B48}"/>
               </a:ext>
             </a:extLst>
           </p:cNvPr>
@@ -2672,7 +2672,7 @@
           <p:cNvPr id="7" name="スライド番号プレースホルダー 6">
             <a:extLst>
               <a:ext uri="{FF2B5EF4-FFF2-40B4-BE49-F238E27FC236}">
-                <a16:creationId xmlns:a16="http://schemas.microsoft.com/office/drawing/2014/main" id="{4409BDF2-C4E2-2D79-2570-0063A125FA9D}"/>
+                <a16:creationId xmlns:a16="http://schemas.microsoft.com/office/drawing/2014/main" id="{F84741B1-AC41-3132-CF74-7AE983A51AB9}"/>
               </a:ext>
             </a:extLst>
           </p:cNvPr>
@@ -2688,7 +2688,7 @@
           <a:bodyPr/>
           <a:lstStyle/>
           <a:p>
-            <a:fld id="{1023ED98-605D-47F7-B5F5-1F5A9FAD4E33}" type="slidenum">
+            <a:fld id="{0D1D62B8-842F-45FF-B7A8-9D8A8E41432F}" type="slidenum">
               <a:rPr kumimoji="1" lang="ja-JP" altLang="en-US" smtClean="0"/>
               <a:t>‹#›</a:t>
             </a:fld>
@@ -2699,7 +2699,7 @@
     </p:spTree>
     <p:extLst>
       <p:ext uri="{BB962C8B-B14F-4D97-AF65-F5344CB8AC3E}">
-        <p14:creationId xmlns:p14="http://schemas.microsoft.com/office/powerpoint/2010/main" val="295380328"/>
+        <p14:creationId xmlns:p14="http://schemas.microsoft.com/office/powerpoint/2010/main" val="992649630"/>
       </p:ext>
     </p:extLst>
   </p:cSld>
@@ -2731,7 +2731,7 @@
           <p:cNvPr id="2" name="タイトル 1">
             <a:extLst>
               <a:ext uri="{FF2B5EF4-FFF2-40B4-BE49-F238E27FC236}">
-                <a16:creationId xmlns:a16="http://schemas.microsoft.com/office/drawing/2014/main" id="{E1D73E1F-9482-7989-6CA1-FA57F653F0B8}"/>
+                <a16:creationId xmlns:a16="http://schemas.microsoft.com/office/drawing/2014/main" id="{B4F5E419-7A84-7139-F013-678DC873C580}"/>
               </a:ext>
             </a:extLst>
           </p:cNvPr>
@@ -2768,7 +2768,7 @@
           <p:cNvPr id="3" name="図プレースホルダー 2">
             <a:extLst>
               <a:ext uri="{FF2B5EF4-FFF2-40B4-BE49-F238E27FC236}">
-                <a16:creationId xmlns:a16="http://schemas.microsoft.com/office/drawing/2014/main" id="{0BBEB97C-B808-19AC-5FB1-908992449F61}"/>
+                <a16:creationId xmlns:a16="http://schemas.microsoft.com/office/drawing/2014/main" id="{FA3A5789-1CFC-2DC7-797F-F3DA3EDEB78B}"/>
               </a:ext>
             </a:extLst>
           </p:cNvPr>
@@ -2835,7 +2835,7 @@
           <p:cNvPr id="4" name="テキスト プレースホルダー 3">
             <a:extLst>
               <a:ext uri="{FF2B5EF4-FFF2-40B4-BE49-F238E27FC236}">
-                <a16:creationId xmlns:a16="http://schemas.microsoft.com/office/drawing/2014/main" id="{8588467F-8414-F771-4926-584BFE6A8F50}"/>
+                <a16:creationId xmlns:a16="http://schemas.microsoft.com/office/drawing/2014/main" id="{07FFD65E-A3E0-74EC-6235-F94DDF3A0CC0}"/>
               </a:ext>
             </a:extLst>
           </p:cNvPr>
@@ -2906,7 +2906,7 @@
           <p:cNvPr id="5" name="日付プレースホルダー 4">
             <a:extLst>
               <a:ext uri="{FF2B5EF4-FFF2-40B4-BE49-F238E27FC236}">
-                <a16:creationId xmlns:a16="http://schemas.microsoft.com/office/drawing/2014/main" id="{3E5185E9-5AB7-98B4-9A13-A14B02A2DAE7}"/>
+                <a16:creationId xmlns:a16="http://schemas.microsoft.com/office/drawing/2014/main" id="{F35560DC-E469-86D6-48E9-2D086DD52069}"/>
               </a:ext>
             </a:extLst>
           </p:cNvPr>
@@ -2922,7 +2922,7 @@
           <a:bodyPr/>
           <a:lstStyle/>
           <a:p>
-            <a:fld id="{F982E1CB-2137-4693-BB90-208C476C9F82}" type="datetimeFigureOut">
+            <a:fld id="{6BF4EA9D-ABED-463D-B5F1-D05E93716221}" type="datetimeFigureOut">
               <a:rPr kumimoji="1" lang="ja-JP" altLang="en-US" smtClean="0"/>
               <a:t>2026/7/30</a:t>
             </a:fld>
@@ -2935,7 +2935,7 @@
           <p:cNvPr id="6" name="フッター プレースホルダー 5">
             <a:extLst>
               <a:ext uri="{FF2B5EF4-FFF2-40B4-BE49-F238E27FC236}">
-                <a16:creationId xmlns:a16="http://schemas.microsoft.com/office/drawing/2014/main" id="{4BE248A9-3390-2B1E-2DB2-95A9948FCB68}"/>
+                <a16:creationId xmlns:a16="http://schemas.microsoft.com/office/drawing/2014/main" id="{C6A47D54-BC68-1FBD-7388-91F06F2D009B}"/>
               </a:ext>
             </a:extLst>
           </p:cNvPr>
@@ -2960,7 +2960,7 @@
           <p:cNvPr id="7" name="スライド番号プレースホルダー 6">
             <a:extLst>
               <a:ext uri="{FF2B5EF4-FFF2-40B4-BE49-F238E27FC236}">
-                <a16:creationId xmlns:a16="http://schemas.microsoft.com/office/drawing/2014/main" id="{3643FE75-519D-35DE-3870-5D98500155FC}"/>
+                <a16:creationId xmlns:a16="http://schemas.microsoft.com/office/drawing/2014/main" id="{520C7AD2-EAA4-DE13-D09E-40B04E38728C}"/>
               </a:ext>
             </a:extLst>
           </p:cNvPr>
@@ -2976,7 +2976,7 @@
           <a:bodyPr/>
           <a:lstStyle/>
           <a:p>
-            <a:fld id="{1023ED98-605D-47F7-B5F5-1F5A9FAD4E33}" type="slidenum">
+            <a:fld id="{0D1D62B8-842F-45FF-B7A8-9D8A8E41432F}" type="slidenum">
               <a:rPr kumimoji="1" lang="ja-JP" altLang="en-US" smtClean="0"/>
               <a:t>‹#›</a:t>
             </a:fld>
@@ -2987,7 +2987,7 @@
     </p:spTree>
     <p:extLst>
       <p:ext uri="{BB962C8B-B14F-4D97-AF65-F5344CB8AC3E}">
-        <p14:creationId xmlns:p14="http://schemas.microsoft.com/office/powerpoint/2010/main" val="3345458383"/>
+        <p14:creationId xmlns:p14="http://schemas.microsoft.com/office/powerpoint/2010/main" val="3317100230"/>
       </p:ext>
     </p:extLst>
   </p:cSld>
@@ -3024,7 +3024,7 @@
           <p:cNvPr id="2" name="タイトル プレースホルダー 1">
             <a:extLst>
               <a:ext uri="{FF2B5EF4-FFF2-40B4-BE49-F238E27FC236}">
-                <a16:creationId xmlns:a16="http://schemas.microsoft.com/office/drawing/2014/main" id="{CBFD50C4-4FE5-9F71-ACAD-4B764A5C29BC}"/>
+                <a16:creationId xmlns:a16="http://schemas.microsoft.com/office/drawing/2014/main" id="{35787E1E-D35C-9F9C-B381-D7352FBD10B4}"/>
               </a:ext>
             </a:extLst>
           </p:cNvPr>
@@ -3062,7 +3062,7 @@
           <p:cNvPr id="3" name="テキスト プレースホルダー 2">
             <a:extLst>
               <a:ext uri="{FF2B5EF4-FFF2-40B4-BE49-F238E27FC236}">
-                <a16:creationId xmlns:a16="http://schemas.microsoft.com/office/drawing/2014/main" id="{5633BE72-D655-CA77-1CC2-C33663F9CB36}"/>
+                <a16:creationId xmlns:a16="http://schemas.microsoft.com/office/drawing/2014/main" id="{FD640B52-7E67-EDAF-2664-A1DC2AD24BC7}"/>
               </a:ext>
             </a:extLst>
           </p:cNvPr>
@@ -3161,7 +3161,7 @@
           <p:cNvPr id="4" name="日付プレースホルダー 3">
             <a:extLst>
               <a:ext uri="{FF2B5EF4-FFF2-40B4-BE49-F238E27FC236}">
-                <a16:creationId xmlns:a16="http://schemas.microsoft.com/office/drawing/2014/main" id="{07716006-2912-A74E-048A-F11E297DD440}"/>
+                <a16:creationId xmlns:a16="http://schemas.microsoft.com/office/drawing/2014/main" id="{D6A55C16-5F84-241A-E3AD-B3FEDB23BB58}"/>
               </a:ext>
             </a:extLst>
           </p:cNvPr>
@@ -3195,7 +3195,7 @@
             </a:lvl1pPr>
           </a:lstStyle>
           <a:p>
-            <a:fld id="{F982E1CB-2137-4693-BB90-208C476C9F82}" type="datetimeFigureOut">
+            <a:fld id="{6BF4EA9D-ABED-463D-B5F1-D05E93716221}" type="datetimeFigureOut">
               <a:rPr kumimoji="1" lang="ja-JP" altLang="en-US" smtClean="0"/>
               <a:t>2026/7/30</a:t>
             </a:fld>
@@ -3208,7 +3208,7 @@
           <p:cNvPr id="5" name="フッター プレースホルダー 4">
             <a:extLst>
               <a:ext uri="{FF2B5EF4-FFF2-40B4-BE49-F238E27FC236}">
-                <a16:creationId xmlns:a16="http://schemas.microsoft.com/office/drawing/2014/main" id="{0CCEFC86-7B44-17B3-5FB3-8DAA40AE9598}"/>
+                <a16:creationId xmlns:a16="http://schemas.microsoft.com/office/drawing/2014/main" id="{A4484EB0-A9A4-C409-2C93-D66D93FE67A1}"/>
               </a:ext>
             </a:extLst>
           </p:cNvPr>
@@ -3251,7 +3251,7 @@
           <p:cNvPr id="6" name="スライド番号プレースホルダー 5">
             <a:extLst>
               <a:ext uri="{FF2B5EF4-FFF2-40B4-BE49-F238E27FC236}">
-                <a16:creationId xmlns:a16="http://schemas.microsoft.com/office/drawing/2014/main" id="{4EF5558C-BD9E-21BE-4D0A-2444BDAA6840}"/>
+                <a16:creationId xmlns:a16="http://schemas.microsoft.com/office/drawing/2014/main" id="{07A24079-E3CF-9428-32C7-0D45AFD41967}"/>
               </a:ext>
             </a:extLst>
           </p:cNvPr>
@@ -3285,7 +3285,7 @@
             </a:lvl1pPr>
           </a:lstStyle>
           <a:p>
-            <a:fld id="{1023ED98-605D-47F7-B5F5-1F5A9FAD4E33}" type="slidenum">
+            <a:fld id="{0D1D62B8-842F-45FF-B7A8-9D8A8E41432F}" type="slidenum">
               <a:rPr kumimoji="1" lang="ja-JP" altLang="en-US" smtClean="0"/>
               <a:t>‹#›</a:t>
             </a:fld>
@@ -3296,7 +3296,7 @@
     </p:spTree>
     <p:extLst>
       <p:ext uri="{BB962C8B-B14F-4D97-AF65-F5344CB8AC3E}">
-        <p14:creationId xmlns:p14="http://schemas.microsoft.com/office/powerpoint/2010/main" val="2561028025"/>
+        <p14:creationId xmlns:p14="http://schemas.microsoft.com/office/powerpoint/2010/main" val="2844051778"/>
       </p:ext>
     </p:extLst>
   </p:cSld>
@@ -3619,7 +3619,7 @@
           <p:cNvPr id="2" name="テキスト ボックス 1">
             <a:extLst>
               <a:ext uri="{FF2B5EF4-FFF2-40B4-BE49-F238E27FC236}">
-                <a16:creationId xmlns:a16="http://schemas.microsoft.com/office/drawing/2014/main" id="{C73E7C43-B2DA-C7FD-7B9C-69D5688AB974}"/>
+                <a16:creationId xmlns:a16="http://schemas.microsoft.com/office/drawing/2014/main" id="{C31500C6-096D-8CA3-0ED4-5F2FD2BEDD57}"/>
               </a:ext>
             </a:extLst>
           </p:cNvPr>
@@ -3665,7 +3665,7 @@
           <p:cNvPr id="3" name="テキスト ボックス 2">
             <a:extLst>
               <a:ext uri="{FF2B5EF4-FFF2-40B4-BE49-F238E27FC236}">
-                <a16:creationId xmlns:a16="http://schemas.microsoft.com/office/drawing/2014/main" id="{512D9BD0-0467-AE6F-25DF-8869577A8377}"/>
+                <a16:creationId xmlns:a16="http://schemas.microsoft.com/office/drawing/2014/main" id="{6F103EC5-2653-CFA8-D7DF-DDB08ED9FD5B}"/>
               </a:ext>
             </a:extLst>
           </p:cNvPr>
@@ -3714,7 +3714,7 @@
           <p:cNvPr id="4" name="テキスト ボックス 3">
             <a:extLst>
               <a:ext uri="{FF2B5EF4-FFF2-40B4-BE49-F238E27FC236}">
-                <a16:creationId xmlns:a16="http://schemas.microsoft.com/office/drawing/2014/main" id="{8982A7F0-89A0-DF62-4CE5-B80870BFD92F}"/>
+                <a16:creationId xmlns:a16="http://schemas.microsoft.com/office/drawing/2014/main" id="{FCE2A2FC-4828-FB46-FB00-0F26CD0F3999}"/>
               </a:ext>
             </a:extLst>
           </p:cNvPr>
@@ -3754,7 +3754,7 @@
           <p:cNvPr id="5" name="テキスト ボックス 4">
             <a:extLst>
               <a:ext uri="{FF2B5EF4-FFF2-40B4-BE49-F238E27FC236}">
-                <a16:creationId xmlns:a16="http://schemas.microsoft.com/office/drawing/2014/main" id="{07D0CDC4-A121-302F-6814-0EE30D319781}"/>
+                <a16:creationId xmlns:a16="http://schemas.microsoft.com/office/drawing/2014/main" id="{CEC50867-B503-05F3-50D3-513F641969F1}"/>
               </a:ext>
             </a:extLst>
           </p:cNvPr>
@@ -3801,7 +3801,7 @@
             <a:hlinkClick r:id="" action="ppaction://media"/>
             <a:extLst>
               <a:ext uri="{FF2B5EF4-FFF2-40B4-BE49-F238E27FC236}">
-                <a16:creationId xmlns:a16="http://schemas.microsoft.com/office/drawing/2014/main" id="{50AEEE22-B720-4095-F8A3-DDFC131C8DD8}"/>
+                <a16:creationId xmlns:a16="http://schemas.microsoft.com/office/drawing/2014/main" id="{5F388D1B-D7C6-BC90-DBD9-CBE14961009F}"/>
               </a:ext>
             </a:extLst>
           </p:cNvPr>
@@ -3836,7 +3836,7 @@
     </p:spTree>
     <p:extLst>
       <p:ext uri="{BB962C8B-B14F-4D97-AF65-F5344CB8AC3E}">
-        <p14:creationId xmlns:p14="http://schemas.microsoft.com/office/powerpoint/2010/main" val="2234408543"/>
+        <p14:creationId xmlns:p14="http://schemas.microsoft.com/office/powerpoint/2010/main" val="1454174030"/>
       </p:ext>
     </p:extLst>
   </p:cSld>
@@ -3960,7 +3960,7 @@
           <p:cNvPr id="2" name="テキスト ボックス 1">
             <a:extLst>
               <a:ext uri="{FF2B5EF4-FFF2-40B4-BE49-F238E27FC236}">
-                <a16:creationId xmlns:a16="http://schemas.microsoft.com/office/drawing/2014/main" id="{CFCF539B-7027-D5DE-825B-B65AEE6DF99F}"/>
+                <a16:creationId xmlns:a16="http://schemas.microsoft.com/office/drawing/2014/main" id="{B8D7ACE1-AAC6-53F2-E1BE-E79D4843A57D}"/>
               </a:ext>
             </a:extLst>
           </p:cNvPr>
@@ -4006,7 +4006,7 @@
           <p:cNvPr id="3" name="テキスト ボックス 2">
             <a:extLst>
               <a:ext uri="{FF2B5EF4-FFF2-40B4-BE49-F238E27FC236}">
-                <a16:creationId xmlns:a16="http://schemas.microsoft.com/office/drawing/2014/main" id="{A1EEAA0E-EC9E-F35A-2FFA-F594401BB193}"/>
+                <a16:creationId xmlns:a16="http://schemas.microsoft.com/office/drawing/2014/main" id="{AA3A1FF5-1D42-FB8F-58CA-090732B02E8B}"/>
               </a:ext>
             </a:extLst>
           </p:cNvPr>
@@ -4046,7 +4046,7 @@
           <p:cNvPr id="4" name="テキスト ボックス 3">
             <a:extLst>
               <a:ext uri="{FF2B5EF4-FFF2-40B4-BE49-F238E27FC236}">
-                <a16:creationId xmlns:a16="http://schemas.microsoft.com/office/drawing/2014/main" id="{6BB840A2-1BE4-044E-E05E-8A49C34304EF}"/>
+                <a16:creationId xmlns:a16="http://schemas.microsoft.com/office/drawing/2014/main" id="{16B79ABC-E385-085F-1FEA-A9EE96E3E221}"/>
               </a:ext>
             </a:extLst>
           </p:cNvPr>
@@ -4095,7 +4095,7 @@
           <p:cNvPr id="5" name="テキスト ボックス 4">
             <a:extLst>
               <a:ext uri="{FF2B5EF4-FFF2-40B4-BE49-F238E27FC236}">
-                <a16:creationId xmlns:a16="http://schemas.microsoft.com/office/drawing/2014/main" id="{87AA594A-B67D-42AF-D34E-28F2CF36DDB7}"/>
+                <a16:creationId xmlns:a16="http://schemas.microsoft.com/office/drawing/2014/main" id="{F3E1D533-8941-6159-2769-4C8D23B55080}"/>
               </a:ext>
             </a:extLst>
           </p:cNvPr>
@@ -4142,7 +4142,7 @@
             <a:hlinkClick r:id="" action="ppaction://media"/>
             <a:extLst>
               <a:ext uri="{FF2B5EF4-FFF2-40B4-BE49-F238E27FC236}">
-                <a16:creationId xmlns:a16="http://schemas.microsoft.com/office/drawing/2014/main" id="{059C24F5-4F8A-AF4B-AD90-0F9F0C416A56}"/>
+                <a16:creationId xmlns:a16="http://schemas.microsoft.com/office/drawing/2014/main" id="{209E7BF3-84C9-098C-057E-1BFDF681C26C}"/>
               </a:ext>
             </a:extLst>
           </p:cNvPr>
@@ -4177,7 +4177,7 @@
     </p:spTree>
     <p:extLst>
       <p:ext uri="{BB962C8B-B14F-4D97-AF65-F5344CB8AC3E}">
-        <p14:creationId xmlns:p14="http://schemas.microsoft.com/office/powerpoint/2010/main" val="693023383"/>
+        <p14:creationId xmlns:p14="http://schemas.microsoft.com/office/powerpoint/2010/main" val="1359760038"/>
       </p:ext>
     </p:extLst>
   </p:cSld>
@@ -4301,7 +4301,7 @@
           <p:cNvPr id="2" name="テキスト ボックス 1">
             <a:extLst>
               <a:ext uri="{FF2B5EF4-FFF2-40B4-BE49-F238E27FC236}">
-                <a16:creationId xmlns:a16="http://schemas.microsoft.com/office/drawing/2014/main" id="{FD4F38DB-CD5B-0044-FF5B-78F47E8F2CDF}"/>
+                <a16:creationId xmlns:a16="http://schemas.microsoft.com/office/drawing/2014/main" id="{67F0DBD2-46A4-DDF0-F3BF-FB829B7ECAE7}"/>
               </a:ext>
             </a:extLst>
           </p:cNvPr>
@@ -4347,7 +4347,7 @@
           <p:cNvPr id="3" name="テキスト ボックス 2">
             <a:extLst>
               <a:ext uri="{FF2B5EF4-FFF2-40B4-BE49-F238E27FC236}">
-                <a16:creationId xmlns:a16="http://schemas.microsoft.com/office/drawing/2014/main" id="{D6278752-2332-63AB-671B-72413FB27AFB}"/>
+                <a16:creationId xmlns:a16="http://schemas.microsoft.com/office/drawing/2014/main" id="{AB0D1F58-03CD-5590-39D9-695AC8D48BEE}"/>
               </a:ext>
             </a:extLst>
           </p:cNvPr>
@@ -4387,7 +4387,7 @@
           <p:cNvPr id="4" name="テキスト ボックス 3">
             <a:extLst>
               <a:ext uri="{FF2B5EF4-FFF2-40B4-BE49-F238E27FC236}">
-                <a16:creationId xmlns:a16="http://schemas.microsoft.com/office/drawing/2014/main" id="{A16CB7C3-BFA2-29FE-572C-9DEA7090B247}"/>
+                <a16:creationId xmlns:a16="http://schemas.microsoft.com/office/drawing/2014/main" id="{88FA93DB-03D7-E60E-9406-E04765718D34}"/>
               </a:ext>
             </a:extLst>
           </p:cNvPr>
@@ -4482,7 +4482,7 @@
           <p:cNvPr id="5" name="テキスト ボックス 4">
             <a:extLst>
               <a:ext uri="{FF2B5EF4-FFF2-40B4-BE49-F238E27FC236}">
-                <a16:creationId xmlns:a16="http://schemas.microsoft.com/office/drawing/2014/main" id="{3E0FA293-60FE-2EF3-19C7-3AA9F0091320}"/>
+                <a16:creationId xmlns:a16="http://schemas.microsoft.com/office/drawing/2014/main" id="{FB4ACB88-4540-EB82-14EA-51CD41315748}"/>
               </a:ext>
             </a:extLst>
           </p:cNvPr>
@@ -4529,7 +4529,7 @@
             <a:hlinkClick r:id="" action="ppaction://media"/>
             <a:extLst>
               <a:ext uri="{FF2B5EF4-FFF2-40B4-BE49-F238E27FC236}">
-                <a16:creationId xmlns:a16="http://schemas.microsoft.com/office/drawing/2014/main" id="{DD9C267A-E141-AE60-8466-FE618E19D27C}"/>
+                <a16:creationId xmlns:a16="http://schemas.microsoft.com/office/drawing/2014/main" id="{64010A80-DD3F-5FB0-FB77-EE991DA83E29}"/>
               </a:ext>
             </a:extLst>
           </p:cNvPr>
@@ -4564,7 +4564,7 @@
     </p:spTree>
     <p:extLst>
       <p:ext uri="{BB962C8B-B14F-4D97-AF65-F5344CB8AC3E}">
-        <p14:creationId xmlns:p14="http://schemas.microsoft.com/office/powerpoint/2010/main" val="3332505754"/>
+        <p14:creationId xmlns:p14="http://schemas.microsoft.com/office/powerpoint/2010/main" val="37971638"/>
       </p:ext>
     </p:extLst>
   </p:cSld>
@@ -4688,7 +4688,7 @@
           <p:cNvPr id="2" name="テキスト ボックス 1">
             <a:extLst>
               <a:ext uri="{FF2B5EF4-FFF2-40B4-BE49-F238E27FC236}">
-                <a16:creationId xmlns:a16="http://schemas.microsoft.com/office/drawing/2014/main" id="{5703BA60-EF3B-5BB9-614E-CDA38BA62983}"/>
+                <a16:creationId xmlns:a16="http://schemas.microsoft.com/office/drawing/2014/main" id="{8F5FB9E3-1FDE-D140-2224-FB7DE27E825C}"/>
               </a:ext>
             </a:extLst>
           </p:cNvPr>
@@ -4734,7 +4734,7 @@
           <p:cNvPr id="3" name="テキスト ボックス 2">
             <a:extLst>
               <a:ext uri="{FF2B5EF4-FFF2-40B4-BE49-F238E27FC236}">
-                <a16:creationId xmlns:a16="http://schemas.microsoft.com/office/drawing/2014/main" id="{663B1829-C53F-6244-ED0F-74B1989BC0FB}"/>
+                <a16:creationId xmlns:a16="http://schemas.microsoft.com/office/drawing/2014/main" id="{58DF1EF3-0E0D-2247-6149-AB5025B622D0}"/>
               </a:ext>
             </a:extLst>
           </p:cNvPr>
@@ -4774,7 +4774,7 @@
           <p:cNvPr id="4" name="テキスト ボックス 3">
             <a:extLst>
               <a:ext uri="{FF2B5EF4-FFF2-40B4-BE49-F238E27FC236}">
-                <a16:creationId xmlns:a16="http://schemas.microsoft.com/office/drawing/2014/main" id="{478B76F0-2F66-20B4-3FBA-6AEE51A1A07B}"/>
+                <a16:creationId xmlns:a16="http://schemas.microsoft.com/office/drawing/2014/main" id="{890CA5DD-18E1-96AE-CF58-6C3F5A33293F}"/>
               </a:ext>
             </a:extLst>
           </p:cNvPr>
@@ -4884,7 +4884,7 @@
           <p:cNvPr id="5" name="テキスト ボックス 4">
             <a:extLst>
               <a:ext uri="{FF2B5EF4-FFF2-40B4-BE49-F238E27FC236}">
-                <a16:creationId xmlns:a16="http://schemas.microsoft.com/office/drawing/2014/main" id="{BDFEEE65-E99B-A230-6AE7-EDFEC8085DE5}"/>
+                <a16:creationId xmlns:a16="http://schemas.microsoft.com/office/drawing/2014/main" id="{D4FDDD5E-F23A-151D-A757-71C710B66777}"/>
               </a:ext>
             </a:extLst>
           </p:cNvPr>
@@ -4931,7 +4931,7 @@
             <a:hlinkClick r:id="" action="ppaction://media"/>
             <a:extLst>
               <a:ext uri="{FF2B5EF4-FFF2-40B4-BE49-F238E27FC236}">
-                <a16:creationId xmlns:a16="http://schemas.microsoft.com/office/drawing/2014/main" id="{490CE54B-C17D-E8DC-84F9-E0F20BB80041}"/>
+                <a16:creationId xmlns:a16="http://schemas.microsoft.com/office/drawing/2014/main" id="{05976DB9-8679-38C5-0332-008716E2B098}"/>
               </a:ext>
             </a:extLst>
           </p:cNvPr>
@@ -4966,7 +4966,7 @@
     </p:spTree>
     <p:extLst>
       <p:ext uri="{BB962C8B-B14F-4D97-AF65-F5344CB8AC3E}">
-        <p14:creationId xmlns:p14="http://schemas.microsoft.com/office/powerpoint/2010/main" val="1044986693"/>
+        <p14:creationId xmlns:p14="http://schemas.microsoft.com/office/powerpoint/2010/main" val="2243334736"/>
       </p:ext>
     </p:extLst>
   </p:cSld>
@@ -5090,7 +5090,7 @@
           <p:cNvPr id="2" name="テキスト ボックス 1">
             <a:extLst>
               <a:ext uri="{FF2B5EF4-FFF2-40B4-BE49-F238E27FC236}">
-                <a16:creationId xmlns:a16="http://schemas.microsoft.com/office/drawing/2014/main" id="{FE6E2BDA-DC64-CA48-A38B-D1797BF77F04}"/>
+                <a16:creationId xmlns:a16="http://schemas.microsoft.com/office/drawing/2014/main" id="{37FBFAEF-6AF6-582F-175E-EF4C2B31D23D}"/>
               </a:ext>
             </a:extLst>
           </p:cNvPr>
@@ -5136,7 +5136,7 @@
           <p:cNvPr id="3" name="テキスト ボックス 2">
             <a:extLst>
               <a:ext uri="{FF2B5EF4-FFF2-40B4-BE49-F238E27FC236}">
-                <a16:creationId xmlns:a16="http://schemas.microsoft.com/office/drawing/2014/main" id="{EA91D92B-03F7-68AB-ED33-6960E46FD54E}"/>
+                <a16:creationId xmlns:a16="http://schemas.microsoft.com/office/drawing/2014/main" id="{C2FAFE28-09B3-8AC4-9B03-0996CB68FA29}"/>
               </a:ext>
             </a:extLst>
           </p:cNvPr>
@@ -5176,7 +5176,7 @@
           <p:cNvPr id="4" name="テキスト ボックス 3">
             <a:extLst>
               <a:ext uri="{FF2B5EF4-FFF2-40B4-BE49-F238E27FC236}">
-                <a16:creationId xmlns:a16="http://schemas.microsoft.com/office/drawing/2014/main" id="{72B3966B-C148-B1DA-6969-7339805F5066}"/>
+                <a16:creationId xmlns:a16="http://schemas.microsoft.com/office/drawing/2014/main" id="{E8BFC273-2C83-BC7F-DFED-E114B90C2852}"/>
               </a:ext>
             </a:extLst>
           </p:cNvPr>
@@ -5200,20 +5200,14 @@
           <a:lstStyle/>
           <a:p>
             <a:r>
-              <a:rPr kumimoji="1" lang="en-US" altLang="ja-JP" sz="2000">
+              <a:rPr kumimoji="1" lang="ja-JP" altLang="en-US" sz="2000">
                 <a:solidFill>
                   <a:srgbClr val="333333"/>
                 </a:solidFill>
                 <a:latin typeface="Arial" panose="020B0604020202020204" pitchFamily="34" charset="0"/>
               </a:rPr>
-              <a:t>Add SEO UGC and monetization strategy</a:t>
-            </a:r>
-            <a:endParaRPr kumimoji="1" lang="ja-JP" altLang="en-US" sz="2000">
-              <a:solidFill>
-                <a:srgbClr val="333333"/>
-              </a:solidFill>
-              <a:latin typeface="Arial" panose="020B0604020202020204" pitchFamily="34" charset="0"/>
-            </a:endParaRPr>
+              <a:t>直近のコミットでは、新機能の追加と実装強化が行われました。</a:t>
+            </a:r>
           </a:p>
         </p:txBody>
       </p:sp>
@@ -5222,7 +5216,7 @@
           <p:cNvPr id="5" name="テキスト ボックス 4">
             <a:extLst>
               <a:ext uri="{FF2B5EF4-FFF2-40B4-BE49-F238E27FC236}">
-                <a16:creationId xmlns:a16="http://schemas.microsoft.com/office/drawing/2014/main" id="{4DD4609E-514F-4032-87FC-3B7B8B36B9C8}"/>
+                <a16:creationId xmlns:a16="http://schemas.microsoft.com/office/drawing/2014/main" id="{BA0993DA-3DC4-1A4B-158A-DBE4BC0D1DD5}"/>
               </a:ext>
             </a:extLst>
           </p:cNvPr>
@@ -5269,7 +5263,7 @@
             <a:hlinkClick r:id="" action="ppaction://media"/>
             <a:extLst>
               <a:ext uri="{FF2B5EF4-FFF2-40B4-BE49-F238E27FC236}">
-                <a16:creationId xmlns:a16="http://schemas.microsoft.com/office/drawing/2014/main" id="{1AD33F96-CB34-A3C1-1CD7-767FC77BBFED}"/>
+                <a16:creationId xmlns:a16="http://schemas.microsoft.com/office/drawing/2014/main" id="{97EA4D2F-96E4-52CD-AB19-2CB2E9FA9C9D}"/>
               </a:ext>
             </a:extLst>
           </p:cNvPr>
@@ -5304,7 +5298,7 @@
     </p:spTree>
     <p:extLst>
       <p:ext uri="{BB962C8B-B14F-4D97-AF65-F5344CB8AC3E}">
-        <p14:creationId xmlns:p14="http://schemas.microsoft.com/office/powerpoint/2010/main" val="3973072508"/>
+        <p14:creationId xmlns:p14="http://schemas.microsoft.com/office/powerpoint/2010/main" val="274180920"/>
       </p:ext>
     </p:extLst>
   </p:cSld>
@@ -5313,10 +5307,10 @@
   </p:clrMapOvr>
   <mc:AlternateContent xmlns:mc="http://schemas.openxmlformats.org/markup-compatibility/2006">
     <mc:Choice xmlns:p14="http://schemas.microsoft.com/office/powerpoint/2010/main" Requires="p14">
-      <p:transition spd="slow" p14:dur="2000" advTm="9000"/>
+      <p:transition spd="slow" p14:dur="2000" advTm="6000"/>
     </mc:Choice>
     <mc:Fallback>
-      <p:transition spd="slow" advTm="9000"/>
+      <p:transition spd="slow" advTm="6000"/>
     </mc:Fallback>
   </mc:AlternateContent>
   <p:timing>
@@ -5347,7 +5341,7 @@
                                   <p:childTnLst>
                                     <p:cmd type="call" cmd="playFrom(0.0)">
                                       <p:cBhvr>
-                                        <p:cTn id="6" dur="8026" fill="hold"/>
+                                        <p:cTn id="6" dur="5687" fill="hold"/>
                                         <p:tgtEl>
                                           <p:spTgt spid="6"/>
                                         </p:tgtEl>
@@ -5428,7 +5422,7 @@
           <p:cNvPr id="2" name="テキスト ボックス 1">
             <a:extLst>
               <a:ext uri="{FF2B5EF4-FFF2-40B4-BE49-F238E27FC236}">
-                <a16:creationId xmlns:a16="http://schemas.microsoft.com/office/drawing/2014/main" id="{9613FE04-C84B-4DAD-F11F-7FC11DBD811D}"/>
+                <a16:creationId xmlns:a16="http://schemas.microsoft.com/office/drawing/2014/main" id="{E8F93AF0-66E6-E79B-0773-74D7447E3ED6}"/>
               </a:ext>
             </a:extLst>
           </p:cNvPr>
@@ -5474,7 +5468,7 @@
           <p:cNvPr id="3" name="テキスト ボックス 2">
             <a:extLst>
               <a:ext uri="{FF2B5EF4-FFF2-40B4-BE49-F238E27FC236}">
-                <a16:creationId xmlns:a16="http://schemas.microsoft.com/office/drawing/2014/main" id="{CAA3DC8F-536C-72DF-FFB2-AF15A3B4C6ED}"/>
+                <a16:creationId xmlns:a16="http://schemas.microsoft.com/office/drawing/2014/main" id="{1E98E5EA-A968-5826-4002-DDD45878AC87}"/>
               </a:ext>
             </a:extLst>
           </p:cNvPr>
@@ -5514,7 +5508,7 @@
           <p:cNvPr id="4" name="テキスト ボックス 3">
             <a:extLst>
               <a:ext uri="{FF2B5EF4-FFF2-40B4-BE49-F238E27FC236}">
-                <a16:creationId xmlns:a16="http://schemas.microsoft.com/office/drawing/2014/main" id="{3DE32BD0-1854-A0FA-5F06-E4DC4F55B158}"/>
+                <a16:creationId xmlns:a16="http://schemas.microsoft.com/office/drawing/2014/main" id="{185ADB24-BDEC-EA55-F17D-31AEC9F3A29F}"/>
               </a:ext>
             </a:extLst>
           </p:cNvPr>
@@ -5579,7 +5573,7 @@
           <p:cNvPr id="5" name="テキスト ボックス 4">
             <a:extLst>
               <a:ext uri="{FF2B5EF4-FFF2-40B4-BE49-F238E27FC236}">
-                <a16:creationId xmlns:a16="http://schemas.microsoft.com/office/drawing/2014/main" id="{23BA72A9-0259-9764-D081-23B47088CD65}"/>
+                <a16:creationId xmlns:a16="http://schemas.microsoft.com/office/drawing/2014/main" id="{25A4030A-24D5-8ADD-8B82-3CFF5BA962B4}"/>
               </a:ext>
             </a:extLst>
           </p:cNvPr>
@@ -5626,7 +5620,7 @@
             <a:hlinkClick r:id="" action="ppaction://media"/>
             <a:extLst>
               <a:ext uri="{FF2B5EF4-FFF2-40B4-BE49-F238E27FC236}">
-                <a16:creationId xmlns:a16="http://schemas.microsoft.com/office/drawing/2014/main" id="{9AE58EE6-47C1-FD9E-B76F-097705A69B5E}"/>
+                <a16:creationId xmlns:a16="http://schemas.microsoft.com/office/drawing/2014/main" id="{4B6A29F0-B810-1B1C-C38D-693E96F00A37}"/>
               </a:ext>
             </a:extLst>
           </p:cNvPr>
@@ -5661,7 +5655,7 @@
     </p:spTree>
     <p:extLst>
       <p:ext uri="{BB962C8B-B14F-4D97-AF65-F5344CB8AC3E}">
-        <p14:creationId xmlns:p14="http://schemas.microsoft.com/office/powerpoint/2010/main" val="1042331528"/>
+        <p14:creationId xmlns:p14="http://schemas.microsoft.com/office/powerpoint/2010/main" val="3345958833"/>
       </p:ext>
     </p:extLst>
   </p:cSld>
